--- a/Project Review Meeting 2.pptx
+++ b/Project Review Meeting 2.pptx
@@ -247,7 +247,7 @@
               <a:pPr>
                 <a:defRPr/>
               </a:pPr>
-              <a:t>2/24/2026</a:t>
+              <a:t>3/23/2026</a:t>
             </a:fld>
             <a:endParaRPr lang="en-US"/>
           </a:p>
@@ -817,7 +817,7 @@
               <a:pPr>
                 <a:defRPr/>
               </a:pPr>
-              <a:t>2/24/2026</a:t>
+              <a:t>3/23/2026</a:t>
             </a:fld>
             <a:endParaRPr lang="en-US"/>
           </a:p>
@@ -1032,7 +1032,7 @@
               <a:pPr>
                 <a:defRPr/>
               </a:pPr>
-              <a:t>2/24/2026</a:t>
+              <a:t>3/23/2026</a:t>
             </a:fld>
             <a:endParaRPr lang="en-US"/>
           </a:p>
@@ -1257,7 +1257,7 @@
               <a:pPr>
                 <a:defRPr/>
               </a:pPr>
-              <a:t>2/24/2026</a:t>
+              <a:t>3/23/2026</a:t>
             </a:fld>
             <a:endParaRPr lang="en-US"/>
           </a:p>
@@ -1472,7 +1472,7 @@
               <a:pPr>
                 <a:defRPr/>
               </a:pPr>
-              <a:t>2/24/2026</a:t>
+              <a:t>3/23/2026</a:t>
             </a:fld>
             <a:endParaRPr lang="en-US"/>
           </a:p>
@@ -1763,7 +1763,7 @@
               <a:pPr>
                 <a:defRPr/>
               </a:pPr>
-              <a:t>2/24/2026</a:t>
+              <a:t>3/23/2026</a:t>
             </a:fld>
             <a:endParaRPr lang="en-US"/>
           </a:p>
@@ -2046,7 +2046,7 @@
               <a:pPr>
                 <a:defRPr/>
               </a:pPr>
-              <a:t>2/24/2026</a:t>
+              <a:t>3/23/2026</a:t>
             </a:fld>
             <a:endParaRPr lang="en-US"/>
           </a:p>
@@ -2476,7 +2476,7 @@
               <a:pPr>
                 <a:defRPr/>
               </a:pPr>
-              <a:t>2/24/2026</a:t>
+              <a:t>3/23/2026</a:t>
             </a:fld>
             <a:endParaRPr lang="en-US"/>
           </a:p>
@@ -2633,7 +2633,7 @@
               <a:pPr>
                 <a:defRPr/>
               </a:pPr>
-              <a:t>2/24/2026</a:t>
+              <a:t>3/23/2026</a:t>
             </a:fld>
             <a:endParaRPr lang="en-US"/>
           </a:p>
@@ -2761,7 +2761,7 @@
               <a:pPr>
                 <a:defRPr/>
               </a:pPr>
-              <a:t>2/24/2026</a:t>
+              <a:t>3/23/2026</a:t>
             </a:fld>
             <a:endParaRPr lang="en-US"/>
           </a:p>
@@ -3089,7 +3089,7 @@
               <a:pPr>
                 <a:defRPr/>
               </a:pPr>
-              <a:t>2/24/2026</a:t>
+              <a:t>3/23/2026</a:t>
             </a:fld>
             <a:endParaRPr lang="en-US"/>
           </a:p>
@@ -3393,7 +3393,7 @@
               <a:pPr>
                 <a:defRPr/>
               </a:pPr>
-              <a:t>2/24/2026</a:t>
+              <a:t>3/23/2026</a:t>
             </a:fld>
             <a:endParaRPr lang="en-US"/>
           </a:p>
@@ -3651,7 +3651,7 @@
               <a:pPr>
                 <a:defRPr/>
               </a:pPr>
-              <a:t>2/24/2026</a:t>
+              <a:t>3/23/2026</a:t>
             </a:fld>
             <a:endParaRPr lang="en-US"/>
           </a:p>
@@ -4451,7 +4451,7 @@
           <p:nvPr>
             <p:extLst>
               <p:ext uri="{D42A27DB-BD31-4B8C-83A1-F6EECF244321}">
-                <p14:modId xmlns:p14="http://schemas.microsoft.com/office/powerpoint/2010/main" val="1766362998"/>
+                <p14:modId xmlns:p14="http://schemas.microsoft.com/office/powerpoint/2010/main" val="2320213389"/>
               </p:ext>
             </p:extLst>
           </p:nvPr>
